--- a/artifacts/slides/agentic-workflows.pptx
+++ b/artifacts/slides/agentic-workflows.pptx
@@ -506,7 +506,7 @@
               <a:t>GitHub Agentic Workflows: what it does, where value comes from, and the bounded control story.,Exact lifecycle: technical-preview. The official announcement names a technical preview. Recheck current lifecycle before adoption.,Verification date: 2026-10-14. Evidence older than 30 days requires re-review.,This is independent enablement for a controlled pilot, not production certification or customer-specific approval.,Cost detail: Copilot-engine inference is governed by its billing entity; other engines have their own provider charges. Private-repository Actions usage can consume included minutes and incur overage. The deterministic daily scan does not call an AI model.,Explicit assumptions:
 GitHub Actions is allowed for this repository.
 AI-engine authentication and budget are administrator-owned.
-No claim that a scheduled workflow is free or that a PAT supplies unlimited usage.,Complete assessment: https://github.com/hammadorg93/copilot-runway/blob/main/features/agentic-workflows/assessment.md,Presenter runbook: https://github.com/hammadorg93/copilot-runway/blob/main/demos/agentic-workflows/README.md,Kit validation: kit-tested. Live feature validation: not-run.,Remote cleanup: Disable the opt-in and cancel only exact demo runs; draft PRs and Actions logs are not removed by a local reset.,Primary sources:
+No claim that a scheduled workflow is free or that a PAT supplies unlimited usage.,Complete assessment: https://github.com/aj-enns/copilot-runway/blob/main/features/agentic-workflows/assessment.md,Presenter runbook: https://github.com/aj-enns/copilot-runway/blob/main/demos/agentic-workflows/README.md,Kit validation: kit-tested. Live feature validation: not-run.,Remote cleanup: Disable the opt-in and cancel only exact demo runs; draft PRs and Actions logs are not removed by a local reset.,Primary sources:
 GitHub Agentic Workflows technical preview announcement: https://github.blog/changelog/2026-02-13-github-agentic-workflows-are-now-in-technical-preview/
 GitHub Agentic Workflows quick start and authentication: https://github.github.io/gh-aw/setup/quick-start/
 Usage-based billing for organizations and enterprises: https://docs.github.com/en/copilot/concepts/billing-and-usage/organizations-and-enterprises/billing
@@ -602,7 +602,7 @@
               <a:t>GitHub Agentic Workflows: pilot decision, evidence gaps, cost assumptions, and how to start the repeatable demo kit.,Exact lifecycle: technical-preview. The official announcement names a technical preview. Recheck current lifecycle before adoption.,Verification date: 2026-10-14. Evidence older than 30 days requires re-review.,This is independent enablement for a controlled pilot, not production certification or customer-specific approval.,Cost detail: Copilot-engine inference is governed by its billing entity; other engines have their own provider charges. Private-repository Actions usage can consume included minutes and incur overage. The deterministic daily scan does not call an AI model.,Explicit assumptions:
 GitHub Actions is allowed for this repository.
 AI-engine authentication and budget are administrator-owned.
-No claim that a scheduled workflow is free or that a PAT supplies unlimited usage.,Complete assessment: https://github.com/hammadorg93/copilot-runway/blob/main/features/agentic-workflows/assessment.md,Presenter runbook: https://github.com/hammadorg93/copilot-runway/blob/main/demos/agentic-workflows/README.md,Kit validation: kit-tested. Live feature validation: not-run.,Remote cleanup: Disable the opt-in and cancel only exact demo runs; draft PRs and Actions logs are not removed by a local reset.,Primary sources:
+No claim that a scheduled workflow is free or that a PAT supplies unlimited usage.,Complete assessment: https://github.com/aj-enns/copilot-runway/blob/main/features/agentic-workflows/assessment.md,Presenter runbook: https://github.com/aj-enns/copilot-runway/blob/main/demos/agentic-workflows/README.md,Kit validation: kit-tested. Live feature validation: not-run.,Remote cleanup: Disable the opt-in and cancel only exact demo runs; draft PRs and Actions logs are not removed by a local reset.,Primary sources:
 GitHub Agentic Workflows technical preview announcement: https://github.blog/changelog/2026-02-13-github-agentic-workflows-are-now-in-technical-preview/
 GitHub Agentic Workflows quick start and authentication: https://github.github.io/gh-aw/setup/quick-start/
 Usage-based billing for organizations and enterprises: https://docs.github.com/en/copilot/concepts/billing-and-usage/organizations-and-enterprises/billing

--- a/artifacts/slides/agentic-workflows.pptx
+++ b/artifacts/slides/agentic-workflows.pptx
@@ -2355,13 +2355,13 @@
             <a:r>
               <a:rPr lang="en-US" sz="3000" b="1" dirty="0">
                 <a:solidFill>
-                  <a:srgbClr val="B11F4B"/>
-                </a:solidFill>
-                <a:latin typeface="Aptos" pitchFamily="34" charset="0"/>
-                <a:ea typeface="Aptos" pitchFamily="34" charset="-122"/>
-                <a:cs typeface="Aptos" pitchFamily="34" charset="-120"/>
-              </a:rPr>
-              <a:t>Pilot with conditions</a:t>
+                  <a:srgbClr val="B91C1C"/>
+                </a:solidFill>
+                <a:latin typeface="Aptos" pitchFamily="34" charset="0"/>
+                <a:ea typeface="Aptos" pitchFamily="34" charset="-122"/>
+                <a:cs typeface="Aptos" pitchFamily="34" charset="-120"/>
+              </a:rPr>
+              <a:t>Hold for evidence</a:t>
             </a:r>
             <a:endParaRPr lang="en-US" sz="3000" dirty="0"/>
           </a:p>
